--- a/AutomaTivio/saida/2026-09/pptx/Tivio ALT 90 - Relatório de Gestão - Setembro 2026.pptx
+++ b/AutomaTivio/saida/2026-09/pptx/Tivio ALT 90 - Relatório de Gestão - Setembro 2026.pptx
@@ -4639,7 +4639,7 @@
         <p:spPr>
           <a:xfrm>
             <a:off x="498960" y="6089934"/>
-            <a:ext cx="4818318" cy="292477"/>
+            <a:ext cx="4952863" cy="292477"/>
           </a:xfrm>
           <a:prstGeom prst="rect">
             <a:avLst/>
@@ -4692,7 +4692,7 @@
         <p:spPr>
           <a:xfrm>
             <a:off x="498960" y="6387609"/>
-            <a:ext cx="5011051" cy="189000"/>
+            <a:ext cx="5150977" cy="189000"/>
           </a:xfrm>
           <a:prstGeom prst="rect">
             <a:avLst/>
@@ -4715,7 +4715,7 @@
                 </a:solidFill>
                 <a:latin typeface="Versos"/>
               </a:rPr>
-              <a:t>74,2%</a:t>
+              <a:t>76,7%</a:t>
             </a:r>
           </a:p>
         </p:txBody>
@@ -4728,8 +4728,8 @@
         </p:nvSpPr>
         <p:spPr>
           <a:xfrm>
-            <a:off x="5505451" y="6239598"/>
-            <a:ext cx="981202" cy="151200"/>
+            <a:off x="5633971" y="6245623"/>
+            <a:ext cx="922234" cy="151200"/>
           </a:xfrm>
           <a:prstGeom prst="rect">
             <a:avLst/>
@@ -4765,8 +4765,8 @@
         </p:nvSpPr>
         <p:spPr>
           <a:xfrm>
-            <a:off x="5505451" y="6395996"/>
-            <a:ext cx="981202" cy="189000"/>
+            <a:off x="5633971" y="6402020"/>
+            <a:ext cx="922234" cy="189000"/>
           </a:xfrm>
           <a:prstGeom prst="rect">
             <a:avLst/>
@@ -4789,7 +4789,7 @@
                 </a:solidFill>
                 <a:latin typeface="Versos"/>
               </a:rPr>
-              <a:t>16,6%</a:t>
+              <a:t>15,7%</a:t>
             </a:r>
           </a:p>
         </p:txBody>
@@ -4802,8 +4802,8 @@
         </p:nvSpPr>
         <p:spPr>
           <a:xfrm>
-            <a:off x="6588658" y="5509350"/>
-            <a:ext cx="520695" cy="201403"/>
+            <a:off x="6649256" y="5550575"/>
+            <a:ext cx="465412" cy="183802"/>
           </a:xfrm>
           <a:prstGeom prst="rect">
             <a:avLst/>
@@ -4816,11 +4816,11 @@
           <a:p>
             <a:pPr algn="l">
               <a:lnSpc>
-                <a:spcPts val="753"/>
-              </a:lnSpc>
-            </a:pPr>
-            <a:r>
-              <a:rPr sz="684" b="0" i="0">
+                <a:spcPts val="674"/>
+              </a:lnSpc>
+            </a:pPr>
+            <a:r>
+              <a:rPr sz="613" b="0" i="0">
                 <a:solidFill>
                   <a:srgbClr val="FFFFFF"/>
                 </a:solidFill>
@@ -4832,11 +4832,11 @@
           <a:p>
             <a:pPr algn="l">
               <a:lnSpc>
-                <a:spcPts val="753"/>
-              </a:lnSpc>
-            </a:pPr>
-            <a:r>
-              <a:rPr sz="684" b="1" i="0">
+                <a:spcPts val="674"/>
+              </a:lnSpc>
+            </a:pPr>
+            <a:r>
+              <a:rPr sz="613" b="1" i="0">
                 <a:solidFill>
                   <a:srgbClr val="FFFFFF"/>
                 </a:solidFill>
@@ -4855,31 +4855,31 @@
         </p:nvSpPr>
         <p:spPr>
           <a:xfrm>
-            <a:off x="6588658" y="5715596"/>
-            <a:ext cx="541522" cy="158760"/>
-          </a:xfrm>
-          <a:prstGeom prst="rect">
-            <a:avLst/>
-          </a:prstGeom>
-          <a:noFill/>
-        </p:spPr>
-        <p:txBody>
-          <a:bodyPr wrap="none" lIns="0" rIns="0" tIns="0" bIns="0" anchor="t"/>
-          <a:lstStyle/>
-          <a:p>
-            <a:pPr algn="l">
-              <a:lnSpc>
-                <a:spcPts val="1159"/>
-              </a:lnSpc>
-            </a:pPr>
-            <a:r>
-              <a:rPr sz="1053" b="1" i="0">
+            <a:off x="6649256" y="5736740"/>
+            <a:ext cx="484029" cy="143640"/>
+          </a:xfrm>
+          <a:prstGeom prst="rect">
+            <a:avLst/>
+          </a:prstGeom>
+          <a:noFill/>
+        </p:spPr>
+        <p:txBody>
+          <a:bodyPr wrap="none" lIns="0" rIns="0" tIns="0" bIns="0" anchor="t"/>
+          <a:lstStyle/>
+          <a:p>
+            <a:pPr algn="l">
+              <a:lnSpc>
+                <a:spcPts val="1034"/>
+              </a:lnSpc>
+            </a:pPr>
+            <a:r>
+              <a:rPr sz="940" b="1" i="0">
                 <a:solidFill>
                   <a:srgbClr val="FFFFFF"/>
                 </a:solidFill>
                 <a:latin typeface="Versos"/>
               </a:rPr>
-              <a:t>3,9%</a:t>
+              <a:t>3,5%</a:t>
             </a:r>
           </a:p>
         </p:txBody>
@@ -4892,31 +4892,47 @@
         </p:nvSpPr>
         <p:spPr>
           <a:xfrm>
-            <a:off x="6588658" y="6038668"/>
-            <a:ext cx="541522" cy="68040"/>
-          </a:xfrm>
-          <a:prstGeom prst="rect">
-            <a:avLst/>
-          </a:prstGeom>
-          <a:noFill/>
-        </p:spPr>
-        <p:txBody>
-          <a:bodyPr wrap="none" lIns="0" rIns="0" tIns="0" bIns="0" anchor="t"/>
-          <a:lstStyle/>
-          <a:p>
-            <a:pPr algn="l">
-              <a:lnSpc>
-                <a:spcPts val="451"/>
-              </a:lnSpc>
-            </a:pPr>
-            <a:r>
-              <a:rPr sz="410" b="0" i="0">
+            <a:off x="6649256" y="5945703"/>
+            <a:ext cx="465412" cy="183802"/>
+          </a:xfrm>
+          <a:prstGeom prst="rect">
+            <a:avLst/>
+          </a:prstGeom>
+          <a:noFill/>
+        </p:spPr>
+        <p:txBody>
+          <a:bodyPr wrap="square" lIns="0" rIns="0" tIns="0" bIns="0" anchor="t"/>
+          <a:lstStyle/>
+          <a:p>
+            <a:pPr algn="l">
+              <a:lnSpc>
+                <a:spcPts val="674"/>
+              </a:lnSpc>
+            </a:pPr>
+            <a:r>
+              <a:rPr sz="613" b="0" i="0">
                 <a:solidFill>
                   <a:srgbClr val="2B3744"/>
                 </a:solidFill>
                 <a:latin typeface="Versos"/>
               </a:rPr>
-              <a:t>Crédito Estruturado</a:t>
+              <a:t>Crédito</a:t>
+            </a:r>
+          </a:p>
+          <a:p>
+            <a:pPr algn="l">
+              <a:lnSpc>
+                <a:spcPts val="674"/>
+              </a:lnSpc>
+            </a:pPr>
+            <a:r>
+              <a:rPr sz="613" b="1" i="0">
+                <a:solidFill>
+                  <a:srgbClr val="2B3744"/>
+                </a:solidFill>
+                <a:latin typeface="Versos"/>
+              </a:rPr>
+              <a:t>Estruturado</a:t>
             </a:r>
           </a:p>
         </p:txBody>
@@ -4929,31 +4945,31 @@
         </p:nvSpPr>
         <p:spPr>
           <a:xfrm>
-            <a:off x="6588658" y="6111196"/>
-            <a:ext cx="541522" cy="158760"/>
-          </a:xfrm>
-          <a:prstGeom prst="rect">
-            <a:avLst/>
-          </a:prstGeom>
-          <a:noFill/>
-        </p:spPr>
-        <p:txBody>
-          <a:bodyPr wrap="none" lIns="0" rIns="0" tIns="0" bIns="0" anchor="t"/>
-          <a:lstStyle/>
-          <a:p>
-            <a:pPr algn="l">
-              <a:lnSpc>
-                <a:spcPts val="1159"/>
-              </a:lnSpc>
-            </a:pPr>
-            <a:r>
-              <a:rPr sz="1053" b="1" i="0">
+            <a:off x="6649256" y="6131868"/>
+            <a:ext cx="484029" cy="143640"/>
+          </a:xfrm>
+          <a:prstGeom prst="rect">
+            <a:avLst/>
+          </a:prstGeom>
+          <a:noFill/>
+        </p:spPr>
+        <p:txBody>
+          <a:bodyPr wrap="none" lIns="0" rIns="0" tIns="0" bIns="0" anchor="t"/>
+          <a:lstStyle/>
+          <a:p>
+            <a:pPr algn="l">
+              <a:lnSpc>
+                <a:spcPts val="1034"/>
+              </a:lnSpc>
+            </a:pPr>
+            <a:r>
+              <a:rPr sz="940" b="1" i="0">
                 <a:solidFill>
                   <a:srgbClr val="2B3744"/>
                 </a:solidFill>
                 <a:latin typeface="Versos"/>
               </a:rPr>
-              <a:t>3,1%</a:t>
+              <a:t>2,8%</a:t>
             </a:r>
           </a:p>
         </p:txBody>
@@ -4966,25 +4982,25 @@
         </p:nvSpPr>
         <p:spPr>
           <a:xfrm>
-            <a:off x="6591729" y="6373670"/>
-            <a:ext cx="280220" cy="105840"/>
-          </a:xfrm>
-          <a:prstGeom prst="rect">
-            <a:avLst/>
-          </a:prstGeom>
-          <a:noFill/>
-        </p:spPr>
-        <p:txBody>
-          <a:bodyPr wrap="none" lIns="0" rIns="0" tIns="0" bIns="0" anchor="t"/>
-          <a:lstStyle/>
-          <a:p>
-            <a:pPr algn="l">
-              <a:lnSpc>
-                <a:spcPts val="785"/>
-              </a:lnSpc>
-            </a:pPr>
-            <a:r>
-              <a:rPr sz="714" b="0" i="0">
+            <a:off x="6657643" y="6379222"/>
+            <a:ext cx="247542" cy="98280"/>
+          </a:xfrm>
+          <a:prstGeom prst="rect">
+            <a:avLst/>
+          </a:prstGeom>
+          <a:noFill/>
+        </p:spPr>
+        <p:txBody>
+          <a:bodyPr wrap="none" lIns="0" rIns="0" tIns="0" bIns="0" anchor="t"/>
+          <a:lstStyle/>
+          <a:p>
+            <a:pPr algn="l">
+              <a:lnSpc>
+                <a:spcPts val="694"/>
+              </a:lnSpc>
+            </a:pPr>
+            <a:r>
+              <a:rPr sz="631" b="0" i="0">
                 <a:solidFill>
                   <a:srgbClr val="2B3744"/>
                 </a:solidFill>
@@ -5003,31 +5019,31 @@
         </p:nvSpPr>
         <p:spPr>
           <a:xfrm>
-            <a:off x="6892830" y="6378159"/>
-            <a:ext cx="214741" cy="105840"/>
-          </a:xfrm>
-          <a:prstGeom prst="rect">
-            <a:avLst/>
-          </a:prstGeom>
-          <a:noFill/>
-        </p:spPr>
-        <p:txBody>
-          <a:bodyPr wrap="none" lIns="0" rIns="0" tIns="0" bIns="0" anchor="t"/>
-          <a:lstStyle/>
-          <a:p>
-            <a:pPr algn="l">
-              <a:lnSpc>
-                <a:spcPts val="714"/>
-              </a:lnSpc>
-            </a:pPr>
-            <a:r>
-              <a:rPr sz="714" b="1" i="0">
+            <a:off x="6923660" y="6375678"/>
+            <a:ext cx="186854" cy="98280"/>
+          </a:xfrm>
+          <a:prstGeom prst="rect">
+            <a:avLst/>
+          </a:prstGeom>
+          <a:noFill/>
+        </p:spPr>
+        <p:txBody>
+          <a:bodyPr wrap="none" lIns="0" rIns="0" tIns="0" bIns="0" anchor="t"/>
+          <a:lstStyle/>
+          <a:p>
+            <a:pPr algn="l">
+              <a:lnSpc>
+                <a:spcPts val="631"/>
+              </a:lnSpc>
+            </a:pPr>
+            <a:r>
+              <a:rPr sz="631" b="1" i="0">
                 <a:solidFill>
                   <a:srgbClr val="2B3744"/>
                 </a:solidFill>
                 <a:latin typeface="Versos"/>
               </a:rPr>
-              <a:t>1,6%</a:t>
+              <a:t>1,5%</a:t>
             </a:r>
           </a:p>
         </p:txBody>
@@ -5040,7 +5056,7 @@
         </p:nvSpPr>
         <p:spPr>
           <a:xfrm>
-            <a:off x="6591729" y="6572593"/>
+            <a:off x="6657643" y="6572593"/>
             <a:ext cx="533291" cy="60480"/>
           </a:xfrm>
           <a:prstGeom prst="rect">
@@ -5077,8 +5093,8 @@
         </p:nvSpPr>
         <p:spPr>
           <a:xfrm>
-            <a:off x="7121638" y="6574955"/>
-            <a:ext cx="129975" cy="60480"/>
+            <a:off x="7187551" y="6574955"/>
+            <a:ext cx="128255" cy="60480"/>
           </a:xfrm>
           <a:prstGeom prst="rect">
             <a:avLst/>
@@ -5101,7 +5117,7 @@
                 </a:solidFill>
                 <a:latin typeface="Versos"/>
               </a:rPr>
-              <a:t>0,6%</a:t>
+              <a:t>0,5%</a:t>
             </a:r>
           </a:p>
         </p:txBody>
@@ -5115,7 +5131,7 @@
         <p:spPr>
           <a:xfrm>
             <a:off x="529200" y="6743638"/>
-            <a:ext cx="1223463" cy="113400"/>
+            <a:ext cx="1221129" cy="113400"/>
           </a:xfrm>
           <a:prstGeom prst="rect">
             <a:avLst/>
@@ -5147,7 +5163,7 @@
                 </a:solidFill>
                 <a:latin typeface="Versos"/>
               </a:rPr>
-              <a:t>74,2%</a:t>
+              <a:t>76,7%</a:t>
             </a:r>
           </a:p>
         </p:txBody>
@@ -5160,8 +5176,8 @@
         </p:nvSpPr>
         <p:spPr>
           <a:xfrm>
-            <a:off x="1970206" y="6743638"/>
-            <a:ext cx="727272" cy="113400"/>
+            <a:off x="1967962" y="6743638"/>
+            <a:ext cx="720146" cy="113400"/>
           </a:xfrm>
           <a:prstGeom prst="rect">
             <a:avLst/>
@@ -5193,7 +5209,7 @@
                 </a:solidFill>
                 <a:latin typeface="Versos"/>
               </a:rPr>
-              <a:t>16,6%</a:t>
+              <a:t>15,7%</a:t>
             </a:r>
           </a:p>
         </p:txBody>
@@ -5206,8 +5222,8 @@
         </p:nvSpPr>
         <p:spPr>
           <a:xfrm>
-            <a:off x="2934106" y="6743638"/>
-            <a:ext cx="1021374" cy="113400"/>
+            <a:off x="2925011" y="6743638"/>
+            <a:ext cx="1018180" cy="113400"/>
           </a:xfrm>
           <a:prstGeom prst="rect">
             <a:avLst/>
@@ -5239,7 +5255,7 @@
                 </a:solidFill>
                 <a:latin typeface="Versos"/>
               </a:rPr>
-              <a:t>3,9%</a:t>
+              <a:t>3,5%</a:t>
             </a:r>
           </a:p>
         </p:txBody>
@@ -5252,8 +5268,8 @@
         </p:nvSpPr>
         <p:spPr>
           <a:xfrm>
-            <a:off x="4180798" y="6743638"/>
-            <a:ext cx="1189802" cy="113400"/>
+            <a:off x="4168631" y="6743638"/>
+            <a:ext cx="1222111" cy="113400"/>
           </a:xfrm>
           <a:prstGeom prst="rect">
             <a:avLst/>
@@ -5285,7 +5301,7 @@
                 </a:solidFill>
                 <a:latin typeface="Versos"/>
               </a:rPr>
-              <a:t>3,1%</a:t>
+              <a:t>2,8%</a:t>
             </a:r>
           </a:p>
         </p:txBody>
@@ -5298,8 +5314,8 @@
         </p:nvSpPr>
         <p:spPr>
           <a:xfrm>
-            <a:off x="5589438" y="6743638"/>
-            <a:ext cx="562653" cy="113400"/>
+            <a:off x="5608338" y="6743638"/>
+            <a:ext cx="559458" cy="113400"/>
           </a:xfrm>
           <a:prstGeom prst="rect">
             <a:avLst/>
@@ -5331,7 +5347,7 @@
                 </a:solidFill>
                 <a:latin typeface="Versos"/>
               </a:rPr>
-              <a:t>1,6%</a:t>
+              <a:t>1,5%</a:t>
             </a:r>
           </a:p>
         </p:txBody>
@@ -5345,7 +5361,7 @@
         <p:spPr>
           <a:xfrm>
             <a:off x="529200" y="6902398"/>
-            <a:ext cx="1322603" cy="113400"/>
+            <a:ext cx="1319409" cy="113400"/>
           </a:xfrm>
           <a:prstGeom prst="rect">
             <a:avLst/>
@@ -5377,7 +5393,7 @@
                 </a:solidFill>
                 <a:latin typeface="Versos"/>
               </a:rPr>
-              <a:t>0,6%</a:t>
+              <a:t>0,5%</a:t>
             </a:r>
           </a:p>
         </p:txBody>
@@ -5729,7 +5745,7 @@
         <p:spPr>
           <a:xfrm>
             <a:off x="3217488" y="1623037"/>
-            <a:ext cx="465232" cy="143640"/>
+            <a:ext cx="459213" cy="143640"/>
           </a:xfrm>
           <a:prstGeom prst="rect">
             <a:avLst/>
@@ -5752,7 +5768,7 @@
                 </a:solidFill>
                 <a:latin typeface="Versos"/>
               </a:rPr>
-              <a:t>29,30%</a:t>
+              <a:t>35,62%</a:t>
             </a:r>
           </a:p>
         </p:txBody>
@@ -5802,7 +5818,7 @@
         </p:nvSpPr>
         <p:spPr>
           <a:xfrm>
-            <a:off x="2556461" y="1880077"/>
+            <a:off x="2462551" y="1880077"/>
             <a:ext cx="430957" cy="143640"/>
           </a:xfrm>
           <a:prstGeom prst="rect">
@@ -5863,7 +5879,7 @@
                 </a:solidFill>
                 <a:latin typeface="Versos"/>
               </a:rPr>
-              <a:t>Financeiro</a:t>
+              <a:t>Crédito PF</a:t>
             </a:r>
           </a:p>
         </p:txBody>
@@ -5876,8 +5892,8 @@
         </p:nvSpPr>
         <p:spPr>
           <a:xfrm>
-            <a:off x="2351632" y="2137117"/>
-            <a:ext cx="355773" cy="143640"/>
+            <a:off x="2334740" y="2137117"/>
+            <a:ext cx="382432" cy="143640"/>
           </a:xfrm>
           <a:prstGeom prst="rect">
             <a:avLst/>
@@ -5900,7 +5916,7 @@
                 </a:solidFill>
                 <a:latin typeface="Versos"/>
               </a:rPr>
-              <a:t>8,01%</a:t>
+              <a:t>9,23%</a:t>
             </a:r>
           </a:p>
         </p:txBody>
@@ -5937,7 +5953,7 @@
                 </a:solidFill>
                 <a:latin typeface="Versos"/>
               </a:rPr>
-              <a:t>Caixa</a:t>
+              <a:t>Financeiro</a:t>
             </a:r>
           </a:p>
         </p:txBody>
@@ -5950,8 +5966,8 @@
         </p:nvSpPr>
         <p:spPr>
           <a:xfrm>
-            <a:off x="2307926" y="2394157"/>
-            <a:ext cx="385749" cy="143640"/>
+            <a:off x="2293751" y="2394157"/>
+            <a:ext cx="355773" cy="143640"/>
           </a:xfrm>
           <a:prstGeom prst="rect">
             <a:avLst/>
@@ -5974,7 +5990,7 @@
                 </a:solidFill>
                 <a:latin typeface="Versos"/>
               </a:rPr>
-              <a:t>6,93%</a:t>
+              <a:t>8,01%</a:t>
             </a:r>
           </a:p>
         </p:txBody>
@@ -6011,7 +6027,7 @@
                 </a:solidFill>
                 <a:latin typeface="Versos"/>
               </a:rPr>
-              <a:t>Crédito PF</a:t>
+              <a:t>Caixa</a:t>
             </a:r>
           </a:p>
         </p:txBody>
@@ -6024,8 +6040,8 @@
         </p:nvSpPr>
         <p:spPr>
           <a:xfrm>
-            <a:off x="2251108" y="2651197"/>
-            <a:ext cx="381940" cy="143640"/>
+            <a:off x="2283710" y="2651197"/>
+            <a:ext cx="362776" cy="143640"/>
           </a:xfrm>
           <a:prstGeom prst="rect">
             <a:avLst/>
@@ -6048,7 +6064,7 @@
                 </a:solidFill>
                 <a:latin typeface="Versos"/>
               </a:rPr>
-              <a:t>5,54%</a:t>
+              <a:t>7,70%</a:t>
             </a:r>
           </a:p>
         </p:txBody>
@@ -6098,7 +6114,7 @@
         </p:nvSpPr>
         <p:spPr>
           <a:xfrm>
-            <a:off x="2195943" y="2908237"/>
+            <a:off x="2165821" y="2908237"/>
             <a:ext cx="353316" cy="143640"/>
           </a:xfrm>
           <a:prstGeom prst="rect">
@@ -6172,7 +6188,7 @@
         </p:nvSpPr>
         <p:spPr>
           <a:xfrm>
-            <a:off x="2181768" y="3165277"/>
+            <a:off x="2154245" y="3165277"/>
             <a:ext cx="387223" cy="143640"/>
           </a:xfrm>
           <a:prstGeom prst="rect">
@@ -6246,7 +6262,7 @@
         </p:nvSpPr>
         <p:spPr>
           <a:xfrm>
-            <a:off x="2170074" y="3422317"/>
+            <a:off x="2144441" y="3422317"/>
             <a:ext cx="382432" cy="143640"/>
           </a:xfrm>
           <a:prstGeom prst="rect">
@@ -6320,7 +6336,7 @@
         </p:nvSpPr>
         <p:spPr>
           <a:xfrm>
-            <a:off x="2168302" y="3679357"/>
+            <a:off x="2143023" y="3679357"/>
             <a:ext cx="388943" cy="143640"/>
           </a:xfrm>
           <a:prstGeom prst="rect">
@@ -6394,7 +6410,7 @@
         </p:nvSpPr>
         <p:spPr>
           <a:xfrm>
-            <a:off x="2165821" y="3936397"/>
+            <a:off x="2141133" y="3936397"/>
             <a:ext cx="385749" cy="143640"/>
           </a:xfrm>
           <a:prstGeom prst="rect">
@@ -6468,7 +6484,7 @@
         </p:nvSpPr>
         <p:spPr>
           <a:xfrm>
-            <a:off x="2138180" y="4193437"/>
+            <a:off x="2118217" y="4193437"/>
             <a:ext cx="376658" cy="143640"/>
           </a:xfrm>
           <a:prstGeom prst="rect">
@@ -6542,7 +6558,7 @@
         </p:nvSpPr>
         <p:spPr>
           <a:xfrm>
-            <a:off x="2113492" y="4450477"/>
+            <a:off x="2097900" y="4450477"/>
             <a:ext cx="341523" cy="143640"/>
           </a:xfrm>
           <a:prstGeom prst="rect">

--- a/AutomaTivio/saida/2026-09/pptx/Tivio ALT 90 - Relatório de Gestão - Setembro 2026.pptx
+++ b/AutomaTivio/saida/2026-09/pptx/Tivio ALT 90 - Relatório de Gestão - Setembro 2026.pptx
@@ -5444,7 +5444,7 @@
         <p:spPr>
           <a:xfrm>
             <a:off x="415800" y="7998598"/>
-            <a:ext cx="6728400" cy="267553"/>
+            <a:ext cx="6728400" cy="265426"/>
           </a:xfrm>
           <a:prstGeom prst="rect">
             <a:avLst/>
@@ -5457,17 +5457,17 @@
           <a:p>
             <a:pPr algn="just">
               <a:lnSpc>
-                <a:spcPts val="1036"/>
-              </a:lnSpc>
-            </a:pPr>
-            <a:r>
-              <a:rPr sz="878" b="0" i="0">
+                <a:spcPts val="1018"/>
+              </a:lnSpc>
+            </a:pPr>
+            <a:r>
+              <a:rPr sz="863" b="0" i="0">
                 <a:solidFill>
                   <a:srgbClr val="222222"/>
                 </a:solidFill>
                 <a:latin typeface="Versos"/>
               </a:rPr>
-              <a:t>O Tivio ALT 90 registrou rentabilidade de 1,17% no mês, equivalente a 108,27% do CDI no período. Desde o início da estratégia, o fundo acumula retorno de 22,67%, frente a 19,70% do CDI, o que corresponde a um desempenho anualizado de 115% do CDI.</a:t>
+              <a:t>O Tivio ALT 90 registrou rentabilidade de 1,17% no mês, equivalente a 108,27% do CDI no período. Desde o início da estratégia, o fundo acumula retorno de 22,67%, frente a 19,70% do CDI, o que corresponde a um desempenho anualizado de 115,11% do CDI.</a:t>
             </a:r>
           </a:p>
         </p:txBody>
@@ -5480,8 +5480,8 @@
         </p:nvSpPr>
         <p:spPr>
           <a:xfrm>
-            <a:off x="415800" y="8328403"/>
-            <a:ext cx="6728400" cy="793445"/>
+            <a:off x="415800" y="8322969"/>
+            <a:ext cx="6728400" cy="782814"/>
           </a:xfrm>
           <a:prstGeom prst="rect">
             <a:avLst/>
@@ -5494,11 +5494,11 @@
           <a:p>
             <a:pPr algn="just">
               <a:lnSpc>
-                <a:spcPts val="1036"/>
-              </a:lnSpc>
-            </a:pPr>
-            <a:r>
-              <a:rPr sz="878" b="0" i="0">
+                <a:spcPts val="1018"/>
+              </a:lnSpc>
+            </a:pPr>
+            <a:r>
+              <a:rPr sz="863" b="0" i="0">
                 <a:solidFill>
                   <a:srgbClr val="222222"/>
                 </a:solidFill>
@@ -5517,8 +5517,8 @@
         </p:nvSpPr>
         <p:spPr>
           <a:xfrm>
-            <a:off x="415800" y="9184100"/>
-            <a:ext cx="6728400" cy="661972"/>
+            <a:off x="415800" y="9164728"/>
+            <a:ext cx="6728400" cy="653467"/>
           </a:xfrm>
           <a:prstGeom prst="rect">
             <a:avLst/>
@@ -5531,11 +5531,11 @@
           <a:p>
             <a:pPr algn="just">
               <a:lnSpc>
-                <a:spcPts val="1036"/>
-              </a:lnSpc>
-            </a:pPr>
-            <a:r>
-              <a:rPr sz="878" b="0" i="0">
+                <a:spcPts val="1018"/>
+              </a:lnSpc>
+            </a:pPr>
+            <a:r>
+              <a:rPr sz="863" b="0" i="0">
                 <a:solidFill>
                   <a:srgbClr val="222222"/>
                 </a:solidFill>
